--- a/教学课件/2026.10/3.1.1函数的概念/高中园模板版/函数的概念_放映版.pptx
+++ b/教学课件/2026.10/3.1.1函数的概念/高中园模板版/函数的概念_放映版.pptx
@@ -2,42 +2,42 @@
 <file path=ppt/presentation.xml><?xml version="1.0" encoding="utf-8"?>
 <p:presentation xmlns:p="http://schemas.openxmlformats.org/presentationml/2006/main">
   <p:sldMasterIdLst>
-    <p:sldMasterId xmlns:r="http://schemas.openxmlformats.org/officeDocument/2006/relationships" id="2147483648" r:id="R6361b85588134f27"/>
+    <p:sldMasterId xmlns:r="http://schemas.openxmlformats.org/officeDocument/2006/relationships" id="2147483648" r:id="R5f5fa485ba7245cb"/>
   </p:sldMasterIdLst>
   <p:notesMasterIdLst>
-    <p:notesMasterId xmlns:r="http://schemas.openxmlformats.org/officeDocument/2006/relationships" r:id="R115a0b4e90874443"/>
+    <p:notesMasterId xmlns:r="http://schemas.openxmlformats.org/officeDocument/2006/relationships" r:id="R0f15abe75739482c"/>
   </p:notesMasterIdLst>
   <p:sldIdLst>
-    <p:sldId xmlns:r="http://schemas.openxmlformats.org/officeDocument/2006/relationships" id="256" r:id="R9554bed70f324687"/>
-    <p:sldId xmlns:r="http://schemas.openxmlformats.org/officeDocument/2006/relationships" id="257" r:id="R22a27c5365ad46a7"/>
-    <p:sldId xmlns:r="http://schemas.openxmlformats.org/officeDocument/2006/relationships" id="258" r:id="Rffab1a26afb54f4f"/>
-    <p:sldId xmlns:r="http://schemas.openxmlformats.org/officeDocument/2006/relationships" id="259" r:id="R851fc557f3464ca1"/>
-    <p:sldId xmlns:r="http://schemas.openxmlformats.org/officeDocument/2006/relationships" id="260" r:id="Rd302d3e533e14e48"/>
-    <p:sldId xmlns:r="http://schemas.openxmlformats.org/officeDocument/2006/relationships" id="261" r:id="Red2bca2f2cc448e1"/>
-    <p:sldId xmlns:r="http://schemas.openxmlformats.org/officeDocument/2006/relationships" id="262" r:id="R8518854be35f4434"/>
-    <p:sldId xmlns:r="http://schemas.openxmlformats.org/officeDocument/2006/relationships" id="263" r:id="R6fd34def36a04302"/>
-    <p:sldId xmlns:r="http://schemas.openxmlformats.org/officeDocument/2006/relationships" id="264" r:id="Rea25a869eb91468f"/>
-    <p:sldId xmlns:r="http://schemas.openxmlformats.org/officeDocument/2006/relationships" id="265" r:id="R0b4d7347a2924e04"/>
-    <p:sldId xmlns:r="http://schemas.openxmlformats.org/officeDocument/2006/relationships" id="266" r:id="Rdcb66bf93d894f7d"/>
-    <p:sldId xmlns:r="http://schemas.openxmlformats.org/officeDocument/2006/relationships" id="267" r:id="R57c80ee1b2c04161"/>
-    <p:sldId xmlns:r="http://schemas.openxmlformats.org/officeDocument/2006/relationships" id="268" r:id="R84cf40a304f8498e"/>
-    <p:sldId xmlns:r="http://schemas.openxmlformats.org/officeDocument/2006/relationships" id="269" r:id="Re113afd60ba14ca1"/>
-    <p:sldId xmlns:r="http://schemas.openxmlformats.org/officeDocument/2006/relationships" id="270" r:id="R8225146f0dd34bed"/>
-    <p:sldId xmlns:r="http://schemas.openxmlformats.org/officeDocument/2006/relationships" id="271" r:id="R92908d5370ea4e75"/>
-    <p:sldId xmlns:r="http://schemas.openxmlformats.org/officeDocument/2006/relationships" id="272" r:id="R8983d1781ea74921"/>
-    <p:sldId xmlns:r="http://schemas.openxmlformats.org/officeDocument/2006/relationships" id="273" r:id="R3ca33e8038394219"/>
-    <p:sldId xmlns:r="http://schemas.openxmlformats.org/officeDocument/2006/relationships" id="274" r:id="Rc004ef4d954443f5"/>
-    <p:sldId xmlns:r="http://schemas.openxmlformats.org/officeDocument/2006/relationships" id="275" r:id="R9d66744c18f64506"/>
-    <p:sldId xmlns:r="http://schemas.openxmlformats.org/officeDocument/2006/relationships" id="276" r:id="R11347c4a4e394ed3"/>
-    <p:sldId xmlns:r="http://schemas.openxmlformats.org/officeDocument/2006/relationships" id="277" r:id="Rfa73daafe2334887"/>
-    <p:sldId xmlns:r="http://schemas.openxmlformats.org/officeDocument/2006/relationships" id="278" r:id="R915d221f418f4119"/>
-    <p:sldId xmlns:r="http://schemas.openxmlformats.org/officeDocument/2006/relationships" id="279" r:id="R6e4a673085f44c53"/>
-    <p:sldId xmlns:r="http://schemas.openxmlformats.org/officeDocument/2006/relationships" id="280" r:id="R80b9f0bf3f0d4238"/>
-    <p:sldId xmlns:r="http://schemas.openxmlformats.org/officeDocument/2006/relationships" id="281" r:id="R327494146a924cc2"/>
-    <p:sldId xmlns:r="http://schemas.openxmlformats.org/officeDocument/2006/relationships" id="282" r:id="R3e71390ac9714b1f"/>
-    <p:sldId xmlns:r="http://schemas.openxmlformats.org/officeDocument/2006/relationships" id="283" r:id="R7ceb9536f4984167"/>
-    <p:sldId xmlns:r="http://schemas.openxmlformats.org/officeDocument/2006/relationships" id="284" r:id="R30e18f00af054299"/>
-    <p:sldId xmlns:r="http://schemas.openxmlformats.org/officeDocument/2006/relationships" id="285" r:id="Rdbd1308eaa5f43eb"/>
+    <p:sldId xmlns:r="http://schemas.openxmlformats.org/officeDocument/2006/relationships" id="256" r:id="Raef1b6c3a6834dcb"/>
+    <p:sldId xmlns:r="http://schemas.openxmlformats.org/officeDocument/2006/relationships" id="257" r:id="Rbfbb0242a6f8473f"/>
+    <p:sldId xmlns:r="http://schemas.openxmlformats.org/officeDocument/2006/relationships" id="258" r:id="R6aa46f03ce5544ee"/>
+    <p:sldId xmlns:r="http://schemas.openxmlformats.org/officeDocument/2006/relationships" id="259" r:id="R0533c8f5d3d64be7"/>
+    <p:sldId xmlns:r="http://schemas.openxmlformats.org/officeDocument/2006/relationships" id="260" r:id="Red89e599baaf409c"/>
+    <p:sldId xmlns:r="http://schemas.openxmlformats.org/officeDocument/2006/relationships" id="261" r:id="R087bae5688bd44e7"/>
+    <p:sldId xmlns:r="http://schemas.openxmlformats.org/officeDocument/2006/relationships" id="262" r:id="R5f5581b1b1134157"/>
+    <p:sldId xmlns:r="http://schemas.openxmlformats.org/officeDocument/2006/relationships" id="263" r:id="R700b4625678443ed"/>
+    <p:sldId xmlns:r="http://schemas.openxmlformats.org/officeDocument/2006/relationships" id="264" r:id="Rc0b4085483084c49"/>
+    <p:sldId xmlns:r="http://schemas.openxmlformats.org/officeDocument/2006/relationships" id="265" r:id="R709a60ec56084513"/>
+    <p:sldId xmlns:r="http://schemas.openxmlformats.org/officeDocument/2006/relationships" id="266" r:id="Rcc0188e3873e4877"/>
+    <p:sldId xmlns:r="http://schemas.openxmlformats.org/officeDocument/2006/relationships" id="267" r:id="Ra05533b1fcf741ad"/>
+    <p:sldId xmlns:r="http://schemas.openxmlformats.org/officeDocument/2006/relationships" id="268" r:id="Rf5dc6bba65ad45b1"/>
+    <p:sldId xmlns:r="http://schemas.openxmlformats.org/officeDocument/2006/relationships" id="269" r:id="Rd4197a107fd542f2"/>
+    <p:sldId xmlns:r="http://schemas.openxmlformats.org/officeDocument/2006/relationships" id="270" r:id="Re0382929a0af43ec"/>
+    <p:sldId xmlns:r="http://schemas.openxmlformats.org/officeDocument/2006/relationships" id="271" r:id="R813e152224b64bc0"/>
+    <p:sldId xmlns:r="http://schemas.openxmlformats.org/officeDocument/2006/relationships" id="272" r:id="Rfeeb341f57784a15"/>
+    <p:sldId xmlns:r="http://schemas.openxmlformats.org/officeDocument/2006/relationships" id="273" r:id="R1934fe870af44026"/>
+    <p:sldId xmlns:r="http://schemas.openxmlformats.org/officeDocument/2006/relationships" id="274" r:id="R90fcd07ae9f64e2b"/>
+    <p:sldId xmlns:r="http://schemas.openxmlformats.org/officeDocument/2006/relationships" id="275" r:id="Re283e2db1ef548b0"/>
+    <p:sldId xmlns:r="http://schemas.openxmlformats.org/officeDocument/2006/relationships" id="276" r:id="Rad7bcf922a774744"/>
+    <p:sldId xmlns:r="http://schemas.openxmlformats.org/officeDocument/2006/relationships" id="277" r:id="R2d86cc07752049fc"/>
+    <p:sldId xmlns:r="http://schemas.openxmlformats.org/officeDocument/2006/relationships" id="278" r:id="Reb395635c67e4b5f"/>
+    <p:sldId xmlns:r="http://schemas.openxmlformats.org/officeDocument/2006/relationships" id="279" r:id="R3b8fdb34a972498d"/>
+    <p:sldId xmlns:r="http://schemas.openxmlformats.org/officeDocument/2006/relationships" id="280" r:id="R893d5275940b433a"/>
+    <p:sldId xmlns:r="http://schemas.openxmlformats.org/officeDocument/2006/relationships" id="281" r:id="Rb29877b436824340"/>
+    <p:sldId xmlns:r="http://schemas.openxmlformats.org/officeDocument/2006/relationships" id="282" r:id="Rec32fc02303346d8"/>
+    <p:sldId xmlns:r="http://schemas.openxmlformats.org/officeDocument/2006/relationships" id="283" r:id="Rd81bdf5f15ff4759"/>
+    <p:sldId xmlns:r="http://schemas.openxmlformats.org/officeDocument/2006/relationships" id="284" r:id="R7006a01d170a47c7"/>
+    <p:sldId xmlns:r="http://schemas.openxmlformats.org/officeDocument/2006/relationships" id="285" r:id="R9a5746a4f2314039"/>
   </p:sldIdLst>
   <p:sldSz cx="12192000" cy="6858000"/>
   <p:notesSz cx="6858000" cy="9144000"/>
@@ -4118,7 +4118,7 @@
           <p:cNvPr id="3" name="Title">
             <a:extLst xmlns:a="http://schemas.openxmlformats.org/drawingml/2006/main">
               <a:ext uri="{FF2B5EF4-FFF2-40B4-BE49-F238E27FC236}">
-                <a16:creationId xmlns:a16="http://schemas.microsoft.com/office/drawing/2014/main" id="{2DF6259F-4D47-475E-8159-DCD94762B697}"/>
+                <a16:creationId xmlns:a16="http://schemas.microsoft.com/office/drawing/2014/main" id="{8DD3ECE5-FD21-4BFD-81F1-7D069DBD4319}"/>
               </a:ext>
             </a:extLst>
           </p:cNvPr>
@@ -4275,7 +4275,7 @@
           <p:cNvPr id="2" name="Subtitle">
             <a:extLst xmlns:a="http://schemas.openxmlformats.org/drawingml/2006/main">
               <a:ext uri="{FF2B5EF4-FFF2-40B4-BE49-F238E27FC236}">
-                <a16:creationId xmlns:a16="http://schemas.microsoft.com/office/drawing/2014/main" id="{18457183-0A60-461B-910E-0FAEA91311AB}"/>
+                <a16:creationId xmlns:a16="http://schemas.microsoft.com/office/drawing/2014/main" id="{B7D9B92E-76F9-4EB5-A42C-E2AF8845847E}"/>
               </a:ext>
             </a:extLst>
           </p:cNvPr>
@@ -4449,7 +4449,7 @@
           <p:cNvPr id="2" name="Section title">
             <a:extLst xmlns:a="http://schemas.openxmlformats.org/drawingml/2006/main">
               <a:ext uri="{FF2B5EF4-FFF2-40B4-BE49-F238E27FC236}">
-                <a16:creationId xmlns:a16="http://schemas.microsoft.com/office/drawing/2014/main" id="{A22A411B-C747-4216-BA6A-5217CC2E88F3}"/>
+                <a16:creationId xmlns:a16="http://schemas.microsoft.com/office/drawing/2014/main" id="{92FB1596-C2C3-4403-91AE-D07DD2462D9C}"/>
               </a:ext>
             </a:extLst>
           </p:cNvPr>
@@ -4623,7 +4623,7 @@
           <p:cNvPr id="3" name="Title">
             <a:extLst xmlns:a="http://schemas.openxmlformats.org/drawingml/2006/main">
               <a:ext uri="{FF2B5EF4-FFF2-40B4-BE49-F238E27FC236}">
-                <a16:creationId xmlns:a16="http://schemas.microsoft.com/office/drawing/2014/main" id="{7D411266-C33C-4CDF-81B2-33A758B12CA0}"/>
+                <a16:creationId xmlns:a16="http://schemas.microsoft.com/office/drawing/2014/main" id="{91963F1F-40BD-4290-9D6F-D754A1AD1F80}"/>
               </a:ext>
             </a:extLst>
           </p:cNvPr>
@@ -4780,7 +4780,7 @@
           <p:cNvPr id="2" name="Body">
             <a:extLst xmlns:a="http://schemas.openxmlformats.org/drawingml/2006/main">
               <a:ext uri="{FF2B5EF4-FFF2-40B4-BE49-F238E27FC236}">
-                <a16:creationId xmlns:a16="http://schemas.microsoft.com/office/drawing/2014/main" id="{2759446D-70C5-424F-BEAE-44383A629CB2}"/>
+                <a16:creationId xmlns:a16="http://schemas.microsoft.com/office/drawing/2014/main" id="{40B3AA0C-2BD4-4821-A91A-838A209CE160}"/>
               </a:ext>
             </a:extLst>
           </p:cNvPr>
@@ -4954,7 +4954,7 @@
           <p:cNvPr id="4" name="Title">
             <a:extLst xmlns:a="http://schemas.openxmlformats.org/drawingml/2006/main">
               <a:ext uri="{FF2B5EF4-FFF2-40B4-BE49-F238E27FC236}">
-                <a16:creationId xmlns:a16="http://schemas.microsoft.com/office/drawing/2014/main" id="{3C030957-FB9E-4927-B7EA-7DF60B8E0C17}"/>
+                <a16:creationId xmlns:a16="http://schemas.microsoft.com/office/drawing/2014/main" id="{CD2B75FC-146E-4215-8690-37E2E63A3349}"/>
               </a:ext>
             </a:extLst>
           </p:cNvPr>
@@ -5111,7 +5111,7 @@
           <p:cNvPr id="2" name="Left column">
             <a:extLst xmlns:a="http://schemas.openxmlformats.org/drawingml/2006/main">
               <a:ext uri="{FF2B5EF4-FFF2-40B4-BE49-F238E27FC236}">
-                <a16:creationId xmlns:a16="http://schemas.microsoft.com/office/drawing/2014/main" id="{C6C53667-5DE4-4682-A7D3-5D7362EBC944}"/>
+                <a16:creationId xmlns:a16="http://schemas.microsoft.com/office/drawing/2014/main" id="{1CA1C6C0-7922-47D7-BF88-4C3489E09C61}"/>
               </a:ext>
             </a:extLst>
           </p:cNvPr>
@@ -5268,7 +5268,7 @@
           <p:cNvPr id="3" name="Right column">
             <a:extLst xmlns:a="http://schemas.openxmlformats.org/drawingml/2006/main">
               <a:ext uri="{FF2B5EF4-FFF2-40B4-BE49-F238E27FC236}">
-                <a16:creationId xmlns:a16="http://schemas.microsoft.com/office/drawing/2014/main" id="{009A0DE4-C73D-433F-B7BC-1EF378DB4AF5}"/>
+                <a16:creationId xmlns:a16="http://schemas.microsoft.com/office/drawing/2014/main" id="{D4A1A60B-DB16-4B22-ACB0-81914AB29696}"/>
               </a:ext>
             </a:extLst>
           </p:cNvPr>
@@ -5442,7 +5442,7 @@
           <p:cNvPr id="3" name="Title">
             <a:extLst xmlns:a="http://schemas.openxmlformats.org/drawingml/2006/main">
               <a:ext uri="{FF2B5EF4-FFF2-40B4-BE49-F238E27FC236}">
-                <a16:creationId xmlns:a16="http://schemas.microsoft.com/office/drawing/2014/main" id="{540DC41C-336F-4EC1-B52B-932D0CDAAE63}"/>
+                <a16:creationId xmlns:a16="http://schemas.microsoft.com/office/drawing/2014/main" id="{EDB74608-F639-417C-BF4E-B6B081D7C811}"/>
               </a:ext>
             </a:extLst>
           </p:cNvPr>
@@ -5599,7 +5599,7 @@
           <p:cNvPr id="2" name="Left column">
             <a:extLst xmlns:a="http://schemas.openxmlformats.org/drawingml/2006/main">
               <a:ext uri="{FF2B5EF4-FFF2-40B4-BE49-F238E27FC236}">
-                <a16:creationId xmlns:a16="http://schemas.microsoft.com/office/drawing/2014/main" id="{8E816CD1-3895-4500-A41E-EE219BCFEB51}"/>
+                <a16:creationId xmlns:a16="http://schemas.microsoft.com/office/drawing/2014/main" id="{1D7C2619-598A-4DFD-B4EB-A6554A4BA83E}"/>
               </a:ext>
             </a:extLst>
           </p:cNvPr>
@@ -5794,12 +5794,12 @@
   </p:cSld>
   <p:clrMap bg1="lt1" tx1="dk1" bg2="lt2" tx2="dk2" accent1="accent1" accent2="accent2" accent3="accent3" accent4="accent4" accent5="accent5" accent6="accent6" hlink="hlink" folHlink="folHlink"/>
   <p:sldLayoutIdLst>
-    <p:sldLayoutId xmlns:r="http://schemas.openxmlformats.org/officeDocument/2006/relationships" id="2147483649" r:id="R2cbdbb7eeaae4011"/>
-    <p:sldLayoutId xmlns:r="http://schemas.openxmlformats.org/officeDocument/2006/relationships" id="2147483650" r:id="Rb1f12d05f15b4bd7"/>
-    <p:sldLayoutId xmlns:r="http://schemas.openxmlformats.org/officeDocument/2006/relationships" id="2147483651" r:id="Rb34cdc85c7ad44d1"/>
-    <p:sldLayoutId xmlns:r="http://schemas.openxmlformats.org/officeDocument/2006/relationships" id="2147483652" r:id="R2016a4e622924adf"/>
-    <p:sldLayoutId xmlns:r="http://schemas.openxmlformats.org/officeDocument/2006/relationships" id="2147483653" r:id="Rf97329431e9048c3"/>
-    <p:sldLayoutId xmlns:r="http://schemas.openxmlformats.org/officeDocument/2006/relationships" id="2147483654" r:id="Rb5e67afb5ab043d6"/>
+    <p:sldLayoutId xmlns:r="http://schemas.openxmlformats.org/officeDocument/2006/relationships" id="2147483649" r:id="R049f931c9c5240fd"/>
+    <p:sldLayoutId xmlns:r="http://schemas.openxmlformats.org/officeDocument/2006/relationships" id="2147483650" r:id="R78507213079f43bc"/>
+    <p:sldLayoutId xmlns:r="http://schemas.openxmlformats.org/officeDocument/2006/relationships" id="2147483651" r:id="R80d83dcf350546a1"/>
+    <p:sldLayoutId xmlns:r="http://schemas.openxmlformats.org/officeDocument/2006/relationships" id="2147483652" r:id="R9008def481ac4bf1"/>
+    <p:sldLayoutId xmlns:r="http://schemas.openxmlformats.org/officeDocument/2006/relationships" id="2147483653" r:id="R24224142c2bd42d9"/>
+    <p:sldLayoutId xmlns:r="http://schemas.openxmlformats.org/officeDocument/2006/relationships" id="2147483654" r:id="R0920aac3ec564c0d"/>
   </p:sldLayoutIdLst>
   <p:txStyles>
     <p:titleStyle>
@@ -6343,7 +6343,7 @@
           <p:cNvPr id="2" name="">
             <a:extLst xmlns:a="http://schemas.openxmlformats.org/drawingml/2006/main">
               <a:ext uri="{FF2B5EF4-FFF2-40B4-BE49-F238E27FC236}">
-                <a16:creationId xmlns:a16="http://schemas.microsoft.com/office/drawing/2014/main" id="{3AD1A711-C7BD-437B-B7D9-CF703895BD45}"/>
+                <a16:creationId xmlns:a16="http://schemas.microsoft.com/office/drawing/2014/main" id="{EC37F2E0-1B81-4772-B920-9FCDEB8C13A4}"/>
               </a:ext>
             </a:extLst>
           </p:cNvPr>
@@ -6353,7 +6353,7 @@
           <p:nvPr/>
         </p:nvPicPr>
         <p:blipFill>
-          <a:blip xmlns:r="http://schemas.openxmlformats.org/officeDocument/2006/relationships" xmlns:a="http://schemas.openxmlformats.org/drawingml/2006/main" r:embed="R80aff5de8306481b"/>
+          <a:blip xmlns:r="http://schemas.openxmlformats.org/officeDocument/2006/relationships" xmlns:a="http://schemas.openxmlformats.org/drawingml/2006/main" r:embed="Rd57ffc0dc5164700"/>
           <a:stretch xmlns:a="http://schemas.openxmlformats.org/drawingml/2006/main"/>
         </p:blipFill>
         <p:spPr>
@@ -6369,7 +6369,7 @@
     </p:spTree>
     <p:extLst>
       <p:ext uri="{BB962C8B-B14F-4D97-AF65-F5344CB8AC3E}">
-        <p14:creationId xmlns:p14="http://schemas.microsoft.com/office/powerpoint/2010/main" val="502096759"/>
+        <p14:creationId xmlns:p14="http://schemas.microsoft.com/office/powerpoint/2010/main" val="2087964224"/>
       </p:ext>
     </p:extLst>
   </p:cSld>
@@ -6393,7 +6393,7 @@
           <p:cNvPr id="2" name="">
             <a:extLst xmlns:a="http://schemas.openxmlformats.org/drawingml/2006/main">
               <a:ext uri="{FF2B5EF4-FFF2-40B4-BE49-F238E27FC236}">
-                <a16:creationId xmlns:a16="http://schemas.microsoft.com/office/drawing/2014/main" id="{34254552-2F83-4A9F-BD98-F6858D1E3EE2}"/>
+                <a16:creationId xmlns:a16="http://schemas.microsoft.com/office/drawing/2014/main" id="{CDDB9D8A-80DD-4EFB-86CA-883A92035339}"/>
               </a:ext>
             </a:extLst>
           </p:cNvPr>
@@ -6403,7 +6403,7 @@
           <p:nvPr/>
         </p:nvPicPr>
         <p:blipFill>
-          <a:blip xmlns:r="http://schemas.openxmlformats.org/officeDocument/2006/relationships" xmlns:a="http://schemas.openxmlformats.org/drawingml/2006/main" r:embed="R59c327de270f4580"/>
+          <a:blip xmlns:r="http://schemas.openxmlformats.org/officeDocument/2006/relationships" xmlns:a="http://schemas.openxmlformats.org/drawingml/2006/main" r:embed="Rfe9d40a1882b4f31"/>
           <a:stretch xmlns:a="http://schemas.openxmlformats.org/drawingml/2006/main"/>
         </p:blipFill>
         <p:spPr>
@@ -6419,7 +6419,7 @@
     </p:spTree>
     <p:extLst>
       <p:ext uri="{BB962C8B-B14F-4D97-AF65-F5344CB8AC3E}">
-        <p14:creationId xmlns:p14="http://schemas.microsoft.com/office/powerpoint/2010/main" val="1817835919"/>
+        <p14:creationId xmlns:p14="http://schemas.microsoft.com/office/powerpoint/2010/main" val="1108423439"/>
       </p:ext>
     </p:extLst>
   </p:cSld>
@@ -6443,7 +6443,7 @@
           <p:cNvPr id="2" name="">
             <a:extLst xmlns:a="http://schemas.openxmlformats.org/drawingml/2006/main">
               <a:ext uri="{FF2B5EF4-FFF2-40B4-BE49-F238E27FC236}">
-                <a16:creationId xmlns:a16="http://schemas.microsoft.com/office/drawing/2014/main" id="{D293DEDA-6A0A-4F93-BB3F-F6965837B545}"/>
+                <a16:creationId xmlns:a16="http://schemas.microsoft.com/office/drawing/2014/main" id="{E571FE1D-F16B-4423-A494-395E74B5DF65}"/>
               </a:ext>
             </a:extLst>
           </p:cNvPr>
@@ -6453,7 +6453,7 @@
           <p:nvPr/>
         </p:nvPicPr>
         <p:blipFill>
-          <a:blip xmlns:r="http://schemas.openxmlformats.org/officeDocument/2006/relationships" xmlns:a="http://schemas.openxmlformats.org/drawingml/2006/main" r:embed="Ra764214b9cab4ef9"/>
+          <a:blip xmlns:r="http://schemas.openxmlformats.org/officeDocument/2006/relationships" xmlns:a="http://schemas.openxmlformats.org/drawingml/2006/main" r:embed="R69d5089aaff04311"/>
           <a:stretch xmlns:a="http://schemas.openxmlformats.org/drawingml/2006/main"/>
         </p:blipFill>
         <p:spPr>
@@ -6469,7 +6469,7 @@
     </p:spTree>
     <p:extLst>
       <p:ext uri="{BB962C8B-B14F-4D97-AF65-F5344CB8AC3E}">
-        <p14:creationId xmlns:p14="http://schemas.microsoft.com/office/powerpoint/2010/main" val="1946746362"/>
+        <p14:creationId xmlns:p14="http://schemas.microsoft.com/office/powerpoint/2010/main" val="1818652874"/>
       </p:ext>
     </p:extLst>
   </p:cSld>
@@ -6493,7 +6493,7 @@
           <p:cNvPr id="2" name="">
             <a:extLst xmlns:a="http://schemas.openxmlformats.org/drawingml/2006/main">
               <a:ext uri="{FF2B5EF4-FFF2-40B4-BE49-F238E27FC236}">
-                <a16:creationId xmlns:a16="http://schemas.microsoft.com/office/drawing/2014/main" id="{CE56E4B8-BE49-4D4E-8520-332B895FD76E}"/>
+                <a16:creationId xmlns:a16="http://schemas.microsoft.com/office/drawing/2014/main" id="{118BA5C0-B356-485C-B08A-2BD1B1D04CEB}"/>
               </a:ext>
             </a:extLst>
           </p:cNvPr>
@@ -6503,7 +6503,7 @@
           <p:nvPr/>
         </p:nvPicPr>
         <p:blipFill>
-          <a:blip xmlns:r="http://schemas.openxmlformats.org/officeDocument/2006/relationships" xmlns:a="http://schemas.openxmlformats.org/drawingml/2006/main" r:embed="R68ce950cf0de49f6"/>
+          <a:blip xmlns:r="http://schemas.openxmlformats.org/officeDocument/2006/relationships" xmlns:a="http://schemas.openxmlformats.org/drawingml/2006/main" r:embed="R07e77329dd0242b1"/>
           <a:stretch xmlns:a="http://schemas.openxmlformats.org/drawingml/2006/main"/>
         </p:blipFill>
         <p:spPr>
@@ -6519,7 +6519,7 @@
     </p:spTree>
     <p:extLst>
       <p:ext uri="{BB962C8B-B14F-4D97-AF65-F5344CB8AC3E}">
-        <p14:creationId xmlns:p14="http://schemas.microsoft.com/office/powerpoint/2010/main" val="762415977"/>
+        <p14:creationId xmlns:p14="http://schemas.microsoft.com/office/powerpoint/2010/main" val="871909178"/>
       </p:ext>
     </p:extLst>
   </p:cSld>
@@ -6543,7 +6543,7 @@
           <p:cNvPr id="2" name="">
             <a:extLst xmlns:a="http://schemas.openxmlformats.org/drawingml/2006/main">
               <a:ext uri="{FF2B5EF4-FFF2-40B4-BE49-F238E27FC236}">
-                <a16:creationId xmlns:a16="http://schemas.microsoft.com/office/drawing/2014/main" id="{BB52BCDE-0B5B-4F45-BF48-2F715221AC49}"/>
+                <a16:creationId xmlns:a16="http://schemas.microsoft.com/office/drawing/2014/main" id="{37787431-B7DA-468F-8D58-8C77D8263202}"/>
               </a:ext>
             </a:extLst>
           </p:cNvPr>
@@ -6553,7 +6553,7 @@
           <p:nvPr/>
         </p:nvPicPr>
         <p:blipFill>
-          <a:blip xmlns:r="http://schemas.openxmlformats.org/officeDocument/2006/relationships" xmlns:a="http://schemas.openxmlformats.org/drawingml/2006/main" r:embed="Rf295a7d73e35499c"/>
+          <a:blip xmlns:r="http://schemas.openxmlformats.org/officeDocument/2006/relationships" xmlns:a="http://schemas.openxmlformats.org/drawingml/2006/main" r:embed="R301e55da00d742d7"/>
           <a:stretch xmlns:a="http://schemas.openxmlformats.org/drawingml/2006/main"/>
         </p:blipFill>
         <p:spPr>
@@ -6569,7 +6569,7 @@
     </p:spTree>
     <p:extLst>
       <p:ext uri="{BB962C8B-B14F-4D97-AF65-F5344CB8AC3E}">
-        <p14:creationId xmlns:p14="http://schemas.microsoft.com/office/powerpoint/2010/main" val="821623762"/>
+        <p14:creationId xmlns:p14="http://schemas.microsoft.com/office/powerpoint/2010/main" val="723901161"/>
       </p:ext>
     </p:extLst>
   </p:cSld>
@@ -6593,7 +6593,7 @@
           <p:cNvPr id="2" name="">
             <a:extLst xmlns:a="http://schemas.openxmlformats.org/drawingml/2006/main">
               <a:ext uri="{FF2B5EF4-FFF2-40B4-BE49-F238E27FC236}">
-                <a16:creationId xmlns:a16="http://schemas.microsoft.com/office/drawing/2014/main" id="{AF6C0E8D-A3A9-4CE5-B2A6-4A4EB73B026C}"/>
+                <a16:creationId xmlns:a16="http://schemas.microsoft.com/office/drawing/2014/main" id="{4D2C3CCC-7A39-4D15-B01B-A7868E70FA8B}"/>
               </a:ext>
             </a:extLst>
           </p:cNvPr>
@@ -6603,7 +6603,7 @@
           <p:nvPr/>
         </p:nvPicPr>
         <p:blipFill>
-          <a:blip xmlns:r="http://schemas.openxmlformats.org/officeDocument/2006/relationships" xmlns:a="http://schemas.openxmlformats.org/drawingml/2006/main" r:embed="R8bc4ddeb2e494987"/>
+          <a:blip xmlns:r="http://schemas.openxmlformats.org/officeDocument/2006/relationships" xmlns:a="http://schemas.openxmlformats.org/drawingml/2006/main" r:embed="R302f65e676c94cb5"/>
           <a:stretch xmlns:a="http://schemas.openxmlformats.org/drawingml/2006/main"/>
         </p:blipFill>
         <p:spPr>
@@ -6619,7 +6619,7 @@
     </p:spTree>
     <p:extLst>
       <p:ext uri="{BB962C8B-B14F-4D97-AF65-F5344CB8AC3E}">
-        <p14:creationId xmlns:p14="http://schemas.microsoft.com/office/powerpoint/2010/main" val="1083162553"/>
+        <p14:creationId xmlns:p14="http://schemas.microsoft.com/office/powerpoint/2010/main" val="760239722"/>
       </p:ext>
     </p:extLst>
   </p:cSld>
@@ -6643,7 +6643,7 @@
           <p:cNvPr id="2" name="">
             <a:extLst xmlns:a="http://schemas.openxmlformats.org/drawingml/2006/main">
               <a:ext uri="{FF2B5EF4-FFF2-40B4-BE49-F238E27FC236}">
-                <a16:creationId xmlns:a16="http://schemas.microsoft.com/office/drawing/2014/main" id="{70F32DEE-7332-4A87-8A57-C82D8FAEC6D5}"/>
+                <a16:creationId xmlns:a16="http://schemas.microsoft.com/office/drawing/2014/main" id="{C4CC25A4-F672-469A-B070-05C5DB6EAA62}"/>
               </a:ext>
             </a:extLst>
           </p:cNvPr>
@@ -6653,7 +6653,7 @@
           <p:nvPr/>
         </p:nvPicPr>
         <p:blipFill>
-          <a:blip xmlns:r="http://schemas.openxmlformats.org/officeDocument/2006/relationships" xmlns:a="http://schemas.openxmlformats.org/drawingml/2006/main" r:embed="R734119480f1c49c5"/>
+          <a:blip xmlns:r="http://schemas.openxmlformats.org/officeDocument/2006/relationships" xmlns:a="http://schemas.openxmlformats.org/drawingml/2006/main" r:embed="Ra543ecad092b4e63"/>
           <a:stretch xmlns:a="http://schemas.openxmlformats.org/drawingml/2006/main"/>
         </p:blipFill>
         <p:spPr>
@@ -6669,7 +6669,7 @@
     </p:spTree>
     <p:extLst>
       <p:ext uri="{BB962C8B-B14F-4D97-AF65-F5344CB8AC3E}">
-        <p14:creationId xmlns:p14="http://schemas.microsoft.com/office/powerpoint/2010/main" val="1736661807"/>
+        <p14:creationId xmlns:p14="http://schemas.microsoft.com/office/powerpoint/2010/main" val="1159867526"/>
       </p:ext>
     </p:extLst>
   </p:cSld>
@@ -6693,7 +6693,7 @@
           <p:cNvPr id="2" name="">
             <a:extLst xmlns:a="http://schemas.openxmlformats.org/drawingml/2006/main">
               <a:ext uri="{FF2B5EF4-FFF2-40B4-BE49-F238E27FC236}">
-                <a16:creationId xmlns:a16="http://schemas.microsoft.com/office/drawing/2014/main" id="{56D915EC-2680-42D2-B538-99199DC8033D}"/>
+                <a16:creationId xmlns:a16="http://schemas.microsoft.com/office/drawing/2014/main" id="{84A7F5F5-B057-4C72-BAEC-49CC62BBD326}"/>
               </a:ext>
             </a:extLst>
           </p:cNvPr>
@@ -6703,7 +6703,7 @@
           <p:nvPr/>
         </p:nvPicPr>
         <p:blipFill>
-          <a:blip xmlns:r="http://schemas.openxmlformats.org/officeDocument/2006/relationships" xmlns:a="http://schemas.openxmlformats.org/drawingml/2006/main" r:embed="R8d5b21f5ba0246ac"/>
+          <a:blip xmlns:r="http://schemas.openxmlformats.org/officeDocument/2006/relationships" xmlns:a="http://schemas.openxmlformats.org/drawingml/2006/main" r:embed="R9111261e747a486c"/>
           <a:stretch xmlns:a="http://schemas.openxmlformats.org/drawingml/2006/main"/>
         </p:blipFill>
         <p:spPr>
@@ -6719,7 +6719,7 @@
     </p:spTree>
     <p:extLst>
       <p:ext uri="{BB962C8B-B14F-4D97-AF65-F5344CB8AC3E}">
-        <p14:creationId xmlns:p14="http://schemas.microsoft.com/office/powerpoint/2010/main" val="2012074389"/>
+        <p14:creationId xmlns:p14="http://schemas.microsoft.com/office/powerpoint/2010/main" val="150642469"/>
       </p:ext>
     </p:extLst>
   </p:cSld>
@@ -6743,7 +6743,7 @@
           <p:cNvPr id="2" name="">
             <a:extLst xmlns:a="http://schemas.openxmlformats.org/drawingml/2006/main">
               <a:ext uri="{FF2B5EF4-FFF2-40B4-BE49-F238E27FC236}">
-                <a16:creationId xmlns:a16="http://schemas.microsoft.com/office/drawing/2014/main" id="{6AC14749-3972-4793-94D7-0441CE91C548}"/>
+                <a16:creationId xmlns:a16="http://schemas.microsoft.com/office/drawing/2014/main" id="{0D461FA4-6BDE-4EC4-9D9D-26CEDBF0D872}"/>
               </a:ext>
             </a:extLst>
           </p:cNvPr>
@@ -6753,7 +6753,7 @@
           <p:nvPr/>
         </p:nvPicPr>
         <p:blipFill>
-          <a:blip xmlns:r="http://schemas.openxmlformats.org/officeDocument/2006/relationships" xmlns:a="http://schemas.openxmlformats.org/drawingml/2006/main" r:embed="Re785f221b054431a"/>
+          <a:blip xmlns:r="http://schemas.openxmlformats.org/officeDocument/2006/relationships" xmlns:a="http://schemas.openxmlformats.org/drawingml/2006/main" r:embed="R2d556d54b9b1419a"/>
           <a:stretch xmlns:a="http://schemas.openxmlformats.org/drawingml/2006/main"/>
         </p:blipFill>
         <p:spPr>
@@ -6769,7 +6769,7 @@
     </p:spTree>
     <p:extLst>
       <p:ext uri="{BB962C8B-B14F-4D97-AF65-F5344CB8AC3E}">
-        <p14:creationId xmlns:p14="http://schemas.microsoft.com/office/powerpoint/2010/main" val="1902832290"/>
+        <p14:creationId xmlns:p14="http://schemas.microsoft.com/office/powerpoint/2010/main" val="1281006304"/>
       </p:ext>
     </p:extLst>
   </p:cSld>
@@ -6793,7 +6793,7 @@
           <p:cNvPr id="2" name="">
             <a:extLst xmlns:a="http://schemas.openxmlformats.org/drawingml/2006/main">
               <a:ext uri="{FF2B5EF4-FFF2-40B4-BE49-F238E27FC236}">
-                <a16:creationId xmlns:a16="http://schemas.microsoft.com/office/drawing/2014/main" id="{F8D315A9-4F3F-4B0F-AFB7-A60B72857359}"/>
+                <a16:creationId xmlns:a16="http://schemas.microsoft.com/office/drawing/2014/main" id="{8E266136-335E-44F9-B356-D7F332FCAD57}"/>
               </a:ext>
             </a:extLst>
           </p:cNvPr>
@@ -6803,7 +6803,7 @@
           <p:nvPr/>
         </p:nvPicPr>
         <p:blipFill>
-          <a:blip xmlns:r="http://schemas.openxmlformats.org/officeDocument/2006/relationships" xmlns:a="http://schemas.openxmlformats.org/drawingml/2006/main" r:embed="R63c38860d4f84631"/>
+          <a:blip xmlns:r="http://schemas.openxmlformats.org/officeDocument/2006/relationships" xmlns:a="http://schemas.openxmlformats.org/drawingml/2006/main" r:embed="Rc07067b5fc784b04"/>
           <a:stretch xmlns:a="http://schemas.openxmlformats.org/drawingml/2006/main"/>
         </p:blipFill>
         <p:spPr>
@@ -6819,7 +6819,7 @@
     </p:spTree>
     <p:extLst>
       <p:ext uri="{BB962C8B-B14F-4D97-AF65-F5344CB8AC3E}">
-        <p14:creationId xmlns:p14="http://schemas.microsoft.com/office/powerpoint/2010/main" val="476272949"/>
+        <p14:creationId xmlns:p14="http://schemas.microsoft.com/office/powerpoint/2010/main" val="1966597474"/>
       </p:ext>
     </p:extLst>
   </p:cSld>
@@ -6843,7 +6843,7 @@
           <p:cNvPr id="2" name="">
             <a:extLst xmlns:a="http://schemas.openxmlformats.org/drawingml/2006/main">
               <a:ext uri="{FF2B5EF4-FFF2-40B4-BE49-F238E27FC236}">
-                <a16:creationId xmlns:a16="http://schemas.microsoft.com/office/drawing/2014/main" id="{66B1FD41-9EB6-4D53-87A8-CB33EF33A82A}"/>
+                <a16:creationId xmlns:a16="http://schemas.microsoft.com/office/drawing/2014/main" id="{1397E45D-859F-4515-A8F0-8D6D0525348E}"/>
               </a:ext>
             </a:extLst>
           </p:cNvPr>
@@ -6853,7 +6853,7 @@
           <p:nvPr/>
         </p:nvPicPr>
         <p:blipFill>
-          <a:blip xmlns:r="http://schemas.openxmlformats.org/officeDocument/2006/relationships" xmlns:a="http://schemas.openxmlformats.org/drawingml/2006/main" r:embed="R7534668dc73a4d5c"/>
+          <a:blip xmlns:r="http://schemas.openxmlformats.org/officeDocument/2006/relationships" xmlns:a="http://schemas.openxmlformats.org/drawingml/2006/main" r:embed="R67e6507bf97f4718"/>
           <a:stretch xmlns:a="http://schemas.openxmlformats.org/drawingml/2006/main"/>
         </p:blipFill>
         <p:spPr>
@@ -6869,7 +6869,7 @@
     </p:spTree>
     <p:extLst>
       <p:ext uri="{BB962C8B-B14F-4D97-AF65-F5344CB8AC3E}">
-        <p14:creationId xmlns:p14="http://schemas.microsoft.com/office/powerpoint/2010/main" val="1999597363"/>
+        <p14:creationId xmlns:p14="http://schemas.microsoft.com/office/powerpoint/2010/main" val="1373429712"/>
       </p:ext>
     </p:extLst>
   </p:cSld>
@@ -6893,7 +6893,7 @@
           <p:cNvPr id="2" name="">
             <a:extLst xmlns:a="http://schemas.openxmlformats.org/drawingml/2006/main">
               <a:ext uri="{FF2B5EF4-FFF2-40B4-BE49-F238E27FC236}">
-                <a16:creationId xmlns:a16="http://schemas.microsoft.com/office/drawing/2014/main" id="{B248B3C3-02AC-4650-A0ED-9B269A7CF4B8}"/>
+                <a16:creationId xmlns:a16="http://schemas.microsoft.com/office/drawing/2014/main" id="{BA06F18B-C04B-4489-A7F7-88D01D1DD6AD}"/>
               </a:ext>
             </a:extLst>
           </p:cNvPr>
@@ -6903,7 +6903,7 @@
           <p:nvPr/>
         </p:nvPicPr>
         <p:blipFill>
-          <a:blip xmlns:r="http://schemas.openxmlformats.org/officeDocument/2006/relationships" xmlns:a="http://schemas.openxmlformats.org/drawingml/2006/main" r:embed="Rf9a7f59cf34443e0"/>
+          <a:blip xmlns:r="http://schemas.openxmlformats.org/officeDocument/2006/relationships" xmlns:a="http://schemas.openxmlformats.org/drawingml/2006/main" r:embed="R2c1839c21a3f45df"/>
           <a:stretch xmlns:a="http://schemas.openxmlformats.org/drawingml/2006/main"/>
         </p:blipFill>
         <p:spPr>
@@ -6919,7 +6919,7 @@
     </p:spTree>
     <p:extLst>
       <p:ext uri="{BB962C8B-B14F-4D97-AF65-F5344CB8AC3E}">
-        <p14:creationId xmlns:p14="http://schemas.microsoft.com/office/powerpoint/2010/main" val="1762879010"/>
+        <p14:creationId xmlns:p14="http://schemas.microsoft.com/office/powerpoint/2010/main" val="1699023436"/>
       </p:ext>
     </p:extLst>
   </p:cSld>
@@ -6943,7 +6943,7 @@
           <p:cNvPr id="2" name="">
             <a:extLst xmlns:a="http://schemas.openxmlformats.org/drawingml/2006/main">
               <a:ext uri="{FF2B5EF4-FFF2-40B4-BE49-F238E27FC236}">
-                <a16:creationId xmlns:a16="http://schemas.microsoft.com/office/drawing/2014/main" id="{91FCAE1B-A47F-4683-8899-D59F0C13723C}"/>
+                <a16:creationId xmlns:a16="http://schemas.microsoft.com/office/drawing/2014/main" id="{0BFC113D-D05E-4917-8A2B-16B24C15D961}"/>
               </a:ext>
             </a:extLst>
           </p:cNvPr>
@@ -6953,7 +6953,7 @@
           <p:nvPr/>
         </p:nvPicPr>
         <p:blipFill>
-          <a:blip xmlns:r="http://schemas.openxmlformats.org/officeDocument/2006/relationships" xmlns:a="http://schemas.openxmlformats.org/drawingml/2006/main" r:embed="Rd089ce0b8d284cb4"/>
+          <a:blip xmlns:r="http://schemas.openxmlformats.org/officeDocument/2006/relationships" xmlns:a="http://schemas.openxmlformats.org/drawingml/2006/main" r:embed="Re13cab9545f64347"/>
           <a:stretch xmlns:a="http://schemas.openxmlformats.org/drawingml/2006/main"/>
         </p:blipFill>
         <p:spPr>
@@ -6969,7 +6969,7 @@
     </p:spTree>
     <p:extLst>
       <p:ext uri="{BB962C8B-B14F-4D97-AF65-F5344CB8AC3E}">
-        <p14:creationId xmlns:p14="http://schemas.microsoft.com/office/powerpoint/2010/main" val="870656944"/>
+        <p14:creationId xmlns:p14="http://schemas.microsoft.com/office/powerpoint/2010/main" val="1269963230"/>
       </p:ext>
     </p:extLst>
   </p:cSld>
@@ -6993,7 +6993,7 @@
           <p:cNvPr id="2" name="">
             <a:extLst xmlns:a="http://schemas.openxmlformats.org/drawingml/2006/main">
               <a:ext uri="{FF2B5EF4-FFF2-40B4-BE49-F238E27FC236}">
-                <a16:creationId xmlns:a16="http://schemas.microsoft.com/office/drawing/2014/main" id="{A026B715-90BC-485E-9776-DAB97C33DA32}"/>
+                <a16:creationId xmlns:a16="http://schemas.microsoft.com/office/drawing/2014/main" id="{EAA666BC-DF0A-479F-B8A0-571123B784A6}"/>
               </a:ext>
             </a:extLst>
           </p:cNvPr>
@@ -7003,7 +7003,7 @@
           <p:nvPr/>
         </p:nvPicPr>
         <p:blipFill>
-          <a:blip xmlns:r="http://schemas.openxmlformats.org/officeDocument/2006/relationships" xmlns:a="http://schemas.openxmlformats.org/drawingml/2006/main" r:embed="Rb88662f5c07d461b"/>
+          <a:blip xmlns:r="http://schemas.openxmlformats.org/officeDocument/2006/relationships" xmlns:a="http://schemas.openxmlformats.org/drawingml/2006/main" r:embed="R9e420e9e325d4756"/>
           <a:stretch xmlns:a="http://schemas.openxmlformats.org/drawingml/2006/main"/>
         </p:blipFill>
         <p:spPr>
@@ -7019,7 +7019,7 @@
     </p:spTree>
     <p:extLst>
       <p:ext uri="{BB962C8B-B14F-4D97-AF65-F5344CB8AC3E}">
-        <p14:creationId xmlns:p14="http://schemas.microsoft.com/office/powerpoint/2010/main" val="102005381"/>
+        <p14:creationId xmlns:p14="http://schemas.microsoft.com/office/powerpoint/2010/main" val="593366898"/>
       </p:ext>
     </p:extLst>
   </p:cSld>
@@ -7043,7 +7043,7 @@
           <p:cNvPr id="2" name="">
             <a:extLst xmlns:a="http://schemas.openxmlformats.org/drawingml/2006/main">
               <a:ext uri="{FF2B5EF4-FFF2-40B4-BE49-F238E27FC236}">
-                <a16:creationId xmlns:a16="http://schemas.microsoft.com/office/drawing/2014/main" id="{765D95C0-1818-4460-B61F-4C6993426F08}"/>
+                <a16:creationId xmlns:a16="http://schemas.microsoft.com/office/drawing/2014/main" id="{1E40A567-B4FD-4A45-941C-BCA4B965E4C1}"/>
               </a:ext>
             </a:extLst>
           </p:cNvPr>
@@ -7053,7 +7053,7 @@
           <p:nvPr/>
         </p:nvPicPr>
         <p:blipFill>
-          <a:blip xmlns:r="http://schemas.openxmlformats.org/officeDocument/2006/relationships" xmlns:a="http://schemas.openxmlformats.org/drawingml/2006/main" r:embed="Rcb4e397f77a849cc"/>
+          <a:blip xmlns:r="http://schemas.openxmlformats.org/officeDocument/2006/relationships" xmlns:a="http://schemas.openxmlformats.org/drawingml/2006/main" r:embed="R256b5d8fbe6243d9"/>
           <a:stretch xmlns:a="http://schemas.openxmlformats.org/drawingml/2006/main"/>
         </p:blipFill>
         <p:spPr>
@@ -7069,7 +7069,7 @@
     </p:spTree>
     <p:extLst>
       <p:ext uri="{BB962C8B-B14F-4D97-AF65-F5344CB8AC3E}">
-        <p14:creationId xmlns:p14="http://schemas.microsoft.com/office/powerpoint/2010/main" val="1940235147"/>
+        <p14:creationId xmlns:p14="http://schemas.microsoft.com/office/powerpoint/2010/main" val="519209707"/>
       </p:ext>
     </p:extLst>
   </p:cSld>
@@ -7093,7 +7093,7 @@
           <p:cNvPr id="2" name="">
             <a:extLst xmlns:a="http://schemas.openxmlformats.org/drawingml/2006/main">
               <a:ext uri="{FF2B5EF4-FFF2-40B4-BE49-F238E27FC236}">
-                <a16:creationId xmlns:a16="http://schemas.microsoft.com/office/drawing/2014/main" id="{69F98C4D-AA46-46C2-9C83-FE88FF0FDD72}"/>
+                <a16:creationId xmlns:a16="http://schemas.microsoft.com/office/drawing/2014/main" id="{322D1012-2136-47F4-8CAB-023B61F2071E}"/>
               </a:ext>
             </a:extLst>
           </p:cNvPr>
@@ -7103,7 +7103,7 @@
           <p:nvPr/>
         </p:nvPicPr>
         <p:blipFill>
-          <a:blip xmlns:r="http://schemas.openxmlformats.org/officeDocument/2006/relationships" xmlns:a="http://schemas.openxmlformats.org/drawingml/2006/main" r:embed="Rd14804f206ad4350"/>
+          <a:blip xmlns:r="http://schemas.openxmlformats.org/officeDocument/2006/relationships" xmlns:a="http://schemas.openxmlformats.org/drawingml/2006/main" r:embed="R7ef4892988d44fea"/>
           <a:stretch xmlns:a="http://schemas.openxmlformats.org/drawingml/2006/main"/>
         </p:blipFill>
         <p:spPr>
@@ -7119,7 +7119,7 @@
     </p:spTree>
     <p:extLst>
       <p:ext uri="{BB962C8B-B14F-4D97-AF65-F5344CB8AC3E}">
-        <p14:creationId xmlns:p14="http://schemas.microsoft.com/office/powerpoint/2010/main" val="508981463"/>
+        <p14:creationId xmlns:p14="http://schemas.microsoft.com/office/powerpoint/2010/main" val="1921692829"/>
       </p:ext>
     </p:extLst>
   </p:cSld>
@@ -7143,7 +7143,7 @@
           <p:cNvPr id="2" name="">
             <a:extLst xmlns:a="http://schemas.openxmlformats.org/drawingml/2006/main">
               <a:ext uri="{FF2B5EF4-FFF2-40B4-BE49-F238E27FC236}">
-                <a16:creationId xmlns:a16="http://schemas.microsoft.com/office/drawing/2014/main" id="{C4D5335C-F8D6-4BC2-BE2B-2FB225968CE1}"/>
+                <a16:creationId xmlns:a16="http://schemas.microsoft.com/office/drawing/2014/main" id="{637B3A52-28EB-4D75-8D98-31853774D563}"/>
               </a:ext>
             </a:extLst>
           </p:cNvPr>
@@ -7153,7 +7153,7 @@
           <p:nvPr/>
         </p:nvPicPr>
         <p:blipFill>
-          <a:blip xmlns:r="http://schemas.openxmlformats.org/officeDocument/2006/relationships" xmlns:a="http://schemas.openxmlformats.org/drawingml/2006/main" r:embed="R6e83d35049694edb"/>
+          <a:blip xmlns:r="http://schemas.openxmlformats.org/officeDocument/2006/relationships" xmlns:a="http://schemas.openxmlformats.org/drawingml/2006/main" r:embed="Rb8738eda3a154518"/>
           <a:stretch xmlns:a="http://schemas.openxmlformats.org/drawingml/2006/main"/>
         </p:blipFill>
         <p:spPr>
@@ -7169,7 +7169,7 @@
     </p:spTree>
     <p:extLst>
       <p:ext uri="{BB962C8B-B14F-4D97-AF65-F5344CB8AC3E}">
-        <p14:creationId xmlns:p14="http://schemas.microsoft.com/office/powerpoint/2010/main" val="1072322979"/>
+        <p14:creationId xmlns:p14="http://schemas.microsoft.com/office/powerpoint/2010/main" val="560104857"/>
       </p:ext>
     </p:extLst>
   </p:cSld>
@@ -7193,7 +7193,7 @@
           <p:cNvPr id="2" name="">
             <a:extLst xmlns:a="http://schemas.openxmlformats.org/drawingml/2006/main">
               <a:ext uri="{FF2B5EF4-FFF2-40B4-BE49-F238E27FC236}">
-                <a16:creationId xmlns:a16="http://schemas.microsoft.com/office/drawing/2014/main" id="{D128C072-29E5-4222-99D8-9C7B1602207C}"/>
+                <a16:creationId xmlns:a16="http://schemas.microsoft.com/office/drawing/2014/main" id="{7E5B51EA-B10E-4854-BA9E-F6EB62126732}"/>
               </a:ext>
             </a:extLst>
           </p:cNvPr>
@@ -7203,7 +7203,7 @@
           <p:nvPr/>
         </p:nvPicPr>
         <p:blipFill>
-          <a:blip xmlns:r="http://schemas.openxmlformats.org/officeDocument/2006/relationships" xmlns:a="http://schemas.openxmlformats.org/drawingml/2006/main" r:embed="Rf8d3508c78f14bb7"/>
+          <a:blip xmlns:r="http://schemas.openxmlformats.org/officeDocument/2006/relationships" xmlns:a="http://schemas.openxmlformats.org/drawingml/2006/main" r:embed="R1e3b20fa31a44a28"/>
           <a:stretch xmlns:a="http://schemas.openxmlformats.org/drawingml/2006/main"/>
         </p:blipFill>
         <p:spPr>
@@ -7219,7 +7219,7 @@
     </p:spTree>
     <p:extLst>
       <p:ext uri="{BB962C8B-B14F-4D97-AF65-F5344CB8AC3E}">
-        <p14:creationId xmlns:p14="http://schemas.microsoft.com/office/powerpoint/2010/main" val="608793867"/>
+        <p14:creationId xmlns:p14="http://schemas.microsoft.com/office/powerpoint/2010/main" val="2137994328"/>
       </p:ext>
     </p:extLst>
   </p:cSld>
@@ -7243,7 +7243,7 @@
           <p:cNvPr id="2" name="">
             <a:extLst xmlns:a="http://schemas.openxmlformats.org/drawingml/2006/main">
               <a:ext uri="{FF2B5EF4-FFF2-40B4-BE49-F238E27FC236}">
-                <a16:creationId xmlns:a16="http://schemas.microsoft.com/office/drawing/2014/main" id="{903342DB-A1FC-4B22-8E14-EBB06B568267}"/>
+                <a16:creationId xmlns:a16="http://schemas.microsoft.com/office/drawing/2014/main" id="{08A1584F-3DF4-492B-8876-318ECCA0D01F}"/>
               </a:ext>
             </a:extLst>
           </p:cNvPr>
@@ -7253,7 +7253,7 @@
           <p:nvPr/>
         </p:nvPicPr>
         <p:blipFill>
-          <a:blip xmlns:r="http://schemas.openxmlformats.org/officeDocument/2006/relationships" xmlns:a="http://schemas.openxmlformats.org/drawingml/2006/main" r:embed="Rff5feae8c63f4b45"/>
+          <a:blip xmlns:r="http://schemas.openxmlformats.org/officeDocument/2006/relationships" xmlns:a="http://schemas.openxmlformats.org/drawingml/2006/main" r:embed="Ra31f888c90344800"/>
           <a:stretch xmlns:a="http://schemas.openxmlformats.org/drawingml/2006/main"/>
         </p:blipFill>
         <p:spPr>
@@ -7269,7 +7269,7 @@
     </p:spTree>
     <p:extLst>
       <p:ext uri="{BB962C8B-B14F-4D97-AF65-F5344CB8AC3E}">
-        <p14:creationId xmlns:p14="http://schemas.microsoft.com/office/powerpoint/2010/main" val="1337049767"/>
+        <p14:creationId xmlns:p14="http://schemas.microsoft.com/office/powerpoint/2010/main" val="127297459"/>
       </p:ext>
     </p:extLst>
   </p:cSld>
@@ -7293,7 +7293,7 @@
           <p:cNvPr id="2" name="">
             <a:extLst xmlns:a="http://schemas.openxmlformats.org/drawingml/2006/main">
               <a:ext uri="{FF2B5EF4-FFF2-40B4-BE49-F238E27FC236}">
-                <a16:creationId xmlns:a16="http://schemas.microsoft.com/office/drawing/2014/main" id="{D0FD7873-8A76-4C71-89E4-054E72DFFFB5}"/>
+                <a16:creationId xmlns:a16="http://schemas.microsoft.com/office/drawing/2014/main" id="{C0185D85-4209-416C-8082-F92B96896BB4}"/>
               </a:ext>
             </a:extLst>
           </p:cNvPr>
@@ -7303,7 +7303,7 @@
           <p:nvPr/>
         </p:nvPicPr>
         <p:blipFill>
-          <a:blip xmlns:r="http://schemas.openxmlformats.org/officeDocument/2006/relationships" xmlns:a="http://schemas.openxmlformats.org/drawingml/2006/main" r:embed="Re994eb8369644290"/>
+          <a:blip xmlns:r="http://schemas.openxmlformats.org/officeDocument/2006/relationships" xmlns:a="http://schemas.openxmlformats.org/drawingml/2006/main" r:embed="R069b672eb1e84e77"/>
           <a:stretch xmlns:a="http://schemas.openxmlformats.org/drawingml/2006/main"/>
         </p:blipFill>
         <p:spPr>
@@ -7319,7 +7319,7 @@
     </p:spTree>
     <p:extLst>
       <p:ext uri="{BB962C8B-B14F-4D97-AF65-F5344CB8AC3E}">
-        <p14:creationId xmlns:p14="http://schemas.microsoft.com/office/powerpoint/2010/main" val="1347282550"/>
+        <p14:creationId xmlns:p14="http://schemas.microsoft.com/office/powerpoint/2010/main" val="1092432755"/>
       </p:ext>
     </p:extLst>
   </p:cSld>
@@ -7343,7 +7343,7 @@
           <p:cNvPr id="2" name="">
             <a:extLst xmlns:a="http://schemas.openxmlformats.org/drawingml/2006/main">
               <a:ext uri="{FF2B5EF4-FFF2-40B4-BE49-F238E27FC236}">
-                <a16:creationId xmlns:a16="http://schemas.microsoft.com/office/drawing/2014/main" id="{54A606D6-243D-4735-913A-F87CBBC78196}"/>
+                <a16:creationId xmlns:a16="http://schemas.microsoft.com/office/drawing/2014/main" id="{D9C04C73-06E4-4478-86D4-B586E6578498}"/>
               </a:ext>
             </a:extLst>
           </p:cNvPr>
@@ -7353,7 +7353,7 @@
           <p:nvPr/>
         </p:nvPicPr>
         <p:blipFill>
-          <a:blip xmlns:r="http://schemas.openxmlformats.org/officeDocument/2006/relationships" xmlns:a="http://schemas.openxmlformats.org/drawingml/2006/main" r:embed="R89a114e760704cb3"/>
+          <a:blip xmlns:r="http://schemas.openxmlformats.org/officeDocument/2006/relationships" xmlns:a="http://schemas.openxmlformats.org/drawingml/2006/main" r:embed="R8fc1ea9713834867"/>
           <a:stretch xmlns:a="http://schemas.openxmlformats.org/drawingml/2006/main"/>
         </p:blipFill>
         <p:spPr>
@@ -7369,7 +7369,7 @@
     </p:spTree>
     <p:extLst>
       <p:ext uri="{BB962C8B-B14F-4D97-AF65-F5344CB8AC3E}">
-        <p14:creationId xmlns:p14="http://schemas.microsoft.com/office/powerpoint/2010/main" val="958987597"/>
+        <p14:creationId xmlns:p14="http://schemas.microsoft.com/office/powerpoint/2010/main" val="1569853749"/>
       </p:ext>
     </p:extLst>
   </p:cSld>
@@ -7393,7 +7393,7 @@
           <p:cNvPr id="2" name="">
             <a:extLst xmlns:a="http://schemas.openxmlformats.org/drawingml/2006/main">
               <a:ext uri="{FF2B5EF4-FFF2-40B4-BE49-F238E27FC236}">
-                <a16:creationId xmlns:a16="http://schemas.microsoft.com/office/drawing/2014/main" id="{0C4AE432-8F25-41F0-946D-7D3915BD2C53}"/>
+                <a16:creationId xmlns:a16="http://schemas.microsoft.com/office/drawing/2014/main" id="{895EC027-DA80-4654-853C-C682C0922867}"/>
               </a:ext>
             </a:extLst>
           </p:cNvPr>
@@ -7403,7 +7403,7 @@
           <p:nvPr/>
         </p:nvPicPr>
         <p:blipFill>
-          <a:blip xmlns:r="http://schemas.openxmlformats.org/officeDocument/2006/relationships" xmlns:a="http://schemas.openxmlformats.org/drawingml/2006/main" r:embed="Rad64468107494481"/>
+          <a:blip xmlns:r="http://schemas.openxmlformats.org/officeDocument/2006/relationships" xmlns:a="http://schemas.openxmlformats.org/drawingml/2006/main" r:embed="R4ead892c5f614541"/>
           <a:stretch xmlns:a="http://schemas.openxmlformats.org/drawingml/2006/main"/>
         </p:blipFill>
         <p:spPr>
@@ -7419,7 +7419,7 @@
     </p:spTree>
     <p:extLst>
       <p:ext uri="{BB962C8B-B14F-4D97-AF65-F5344CB8AC3E}">
-        <p14:creationId xmlns:p14="http://schemas.microsoft.com/office/powerpoint/2010/main" val="479699947"/>
+        <p14:creationId xmlns:p14="http://schemas.microsoft.com/office/powerpoint/2010/main" val="129896758"/>
       </p:ext>
     </p:extLst>
   </p:cSld>
@@ -7443,7 +7443,7 @@
           <p:cNvPr id="2" name="">
             <a:extLst xmlns:a="http://schemas.openxmlformats.org/drawingml/2006/main">
               <a:ext uri="{FF2B5EF4-FFF2-40B4-BE49-F238E27FC236}">
-                <a16:creationId xmlns:a16="http://schemas.microsoft.com/office/drawing/2014/main" id="{2E42342D-9314-4E99-B15D-33D6A07FCB60}"/>
+                <a16:creationId xmlns:a16="http://schemas.microsoft.com/office/drawing/2014/main" id="{87DBAD94-BB76-4A65-90F3-A94EE2C4223E}"/>
               </a:ext>
             </a:extLst>
           </p:cNvPr>
@@ -7453,7 +7453,7 @@
           <p:nvPr/>
         </p:nvPicPr>
         <p:blipFill>
-          <a:blip xmlns:r="http://schemas.openxmlformats.org/officeDocument/2006/relationships" xmlns:a="http://schemas.openxmlformats.org/drawingml/2006/main" r:embed="R160b1045c34d4ebc"/>
+          <a:blip xmlns:r="http://schemas.openxmlformats.org/officeDocument/2006/relationships" xmlns:a="http://schemas.openxmlformats.org/drawingml/2006/main" r:embed="R28f082d39d874154"/>
           <a:stretch xmlns:a="http://schemas.openxmlformats.org/drawingml/2006/main"/>
         </p:blipFill>
         <p:spPr>
@@ -7469,7 +7469,7 @@
     </p:spTree>
     <p:extLst>
       <p:ext uri="{BB962C8B-B14F-4D97-AF65-F5344CB8AC3E}">
-        <p14:creationId xmlns:p14="http://schemas.microsoft.com/office/powerpoint/2010/main" val="1198346342"/>
+        <p14:creationId xmlns:p14="http://schemas.microsoft.com/office/powerpoint/2010/main" val="1323372719"/>
       </p:ext>
     </p:extLst>
   </p:cSld>
@@ -7493,7 +7493,7 @@
           <p:cNvPr id="2" name="">
             <a:extLst xmlns:a="http://schemas.openxmlformats.org/drawingml/2006/main">
               <a:ext uri="{FF2B5EF4-FFF2-40B4-BE49-F238E27FC236}">
-                <a16:creationId xmlns:a16="http://schemas.microsoft.com/office/drawing/2014/main" id="{633EDAA3-0895-4EE4-9258-3C49361C8B9E}"/>
+                <a16:creationId xmlns:a16="http://schemas.microsoft.com/office/drawing/2014/main" id="{E8F0E67D-7BB7-42E1-B5CB-B8C7305E2FE5}"/>
               </a:ext>
             </a:extLst>
           </p:cNvPr>
@@ -7503,7 +7503,7 @@
           <p:nvPr/>
         </p:nvPicPr>
         <p:blipFill>
-          <a:blip xmlns:r="http://schemas.openxmlformats.org/officeDocument/2006/relationships" xmlns:a="http://schemas.openxmlformats.org/drawingml/2006/main" r:embed="Rcdbb7b859b414bc9"/>
+          <a:blip xmlns:r="http://schemas.openxmlformats.org/officeDocument/2006/relationships" xmlns:a="http://schemas.openxmlformats.org/drawingml/2006/main" r:embed="R075e29307d8a4746"/>
           <a:stretch xmlns:a="http://schemas.openxmlformats.org/drawingml/2006/main"/>
         </p:blipFill>
         <p:spPr>
@@ -7519,7 +7519,7 @@
     </p:spTree>
     <p:extLst>
       <p:ext uri="{BB962C8B-B14F-4D97-AF65-F5344CB8AC3E}">
-        <p14:creationId xmlns:p14="http://schemas.microsoft.com/office/powerpoint/2010/main" val="1996963236"/>
+        <p14:creationId xmlns:p14="http://schemas.microsoft.com/office/powerpoint/2010/main" val="2005143898"/>
       </p:ext>
     </p:extLst>
   </p:cSld>
@@ -7543,7 +7543,7 @@
           <p:cNvPr id="2" name="">
             <a:extLst xmlns:a="http://schemas.openxmlformats.org/drawingml/2006/main">
               <a:ext uri="{FF2B5EF4-FFF2-40B4-BE49-F238E27FC236}">
-                <a16:creationId xmlns:a16="http://schemas.microsoft.com/office/drawing/2014/main" id="{2DB77C05-AC57-482A-B20D-6C0E8863100E}"/>
+                <a16:creationId xmlns:a16="http://schemas.microsoft.com/office/drawing/2014/main" id="{ED5642C2-80F5-4C3D-9CFD-B388AC1D787B}"/>
               </a:ext>
             </a:extLst>
           </p:cNvPr>
@@ -7553,7 +7553,7 @@
           <p:nvPr/>
         </p:nvPicPr>
         <p:blipFill>
-          <a:blip xmlns:r="http://schemas.openxmlformats.org/officeDocument/2006/relationships" xmlns:a="http://schemas.openxmlformats.org/drawingml/2006/main" r:embed="R6c52778f41a348a2"/>
+          <a:blip xmlns:r="http://schemas.openxmlformats.org/officeDocument/2006/relationships" xmlns:a="http://schemas.openxmlformats.org/drawingml/2006/main" r:embed="Rbcd25fdaf34542f8"/>
           <a:stretch xmlns:a="http://schemas.openxmlformats.org/drawingml/2006/main"/>
         </p:blipFill>
         <p:spPr>
@@ -7569,7 +7569,7 @@
     </p:spTree>
     <p:extLst>
       <p:ext uri="{BB962C8B-B14F-4D97-AF65-F5344CB8AC3E}">
-        <p14:creationId xmlns:p14="http://schemas.microsoft.com/office/powerpoint/2010/main" val="349804917"/>
+        <p14:creationId xmlns:p14="http://schemas.microsoft.com/office/powerpoint/2010/main" val="467350368"/>
       </p:ext>
     </p:extLst>
   </p:cSld>
@@ -7593,7 +7593,7 @@
           <p:cNvPr id="2" name="">
             <a:extLst xmlns:a="http://schemas.openxmlformats.org/drawingml/2006/main">
               <a:ext uri="{FF2B5EF4-FFF2-40B4-BE49-F238E27FC236}">
-                <a16:creationId xmlns:a16="http://schemas.microsoft.com/office/drawing/2014/main" id="{95725272-C9D8-45FD-BA12-CB3190104456}"/>
+                <a16:creationId xmlns:a16="http://schemas.microsoft.com/office/drawing/2014/main" id="{B900200D-E595-4979-81B0-037E7B19B0CC}"/>
               </a:ext>
             </a:extLst>
           </p:cNvPr>
@@ -7603,7 +7603,7 @@
           <p:nvPr/>
         </p:nvPicPr>
         <p:blipFill>
-          <a:blip xmlns:r="http://schemas.openxmlformats.org/officeDocument/2006/relationships" xmlns:a="http://schemas.openxmlformats.org/drawingml/2006/main" r:embed="R63758a54d4844c50"/>
+          <a:blip xmlns:r="http://schemas.openxmlformats.org/officeDocument/2006/relationships" xmlns:a="http://schemas.openxmlformats.org/drawingml/2006/main" r:embed="R510f9d6e23494dc3"/>
           <a:stretch xmlns:a="http://schemas.openxmlformats.org/drawingml/2006/main"/>
         </p:blipFill>
         <p:spPr>
@@ -7619,7 +7619,7 @@
     </p:spTree>
     <p:extLst>
       <p:ext uri="{BB962C8B-B14F-4D97-AF65-F5344CB8AC3E}">
-        <p14:creationId xmlns:p14="http://schemas.microsoft.com/office/powerpoint/2010/main" val="591198176"/>
+        <p14:creationId xmlns:p14="http://schemas.microsoft.com/office/powerpoint/2010/main" val="1814068849"/>
       </p:ext>
     </p:extLst>
   </p:cSld>
@@ -7643,7 +7643,7 @@
           <p:cNvPr id="2" name="">
             <a:extLst xmlns:a="http://schemas.openxmlformats.org/drawingml/2006/main">
               <a:ext uri="{FF2B5EF4-FFF2-40B4-BE49-F238E27FC236}">
-                <a16:creationId xmlns:a16="http://schemas.microsoft.com/office/drawing/2014/main" id="{F27D1B01-60E2-49B0-8BC8-CFA2FB88DA48}"/>
+                <a16:creationId xmlns:a16="http://schemas.microsoft.com/office/drawing/2014/main" id="{E28C34E8-7174-4787-A54C-7388A3E1D290}"/>
               </a:ext>
             </a:extLst>
           </p:cNvPr>
@@ -7653,7 +7653,7 @@
           <p:nvPr/>
         </p:nvPicPr>
         <p:blipFill>
-          <a:blip xmlns:r="http://schemas.openxmlformats.org/officeDocument/2006/relationships" xmlns:a="http://schemas.openxmlformats.org/drawingml/2006/main" r:embed="R8a7ed6115574416c"/>
+          <a:blip xmlns:r="http://schemas.openxmlformats.org/officeDocument/2006/relationships" xmlns:a="http://schemas.openxmlformats.org/drawingml/2006/main" r:embed="R64dcb4b4a29144d3"/>
           <a:stretch xmlns:a="http://schemas.openxmlformats.org/drawingml/2006/main"/>
         </p:blipFill>
         <p:spPr>
@@ -7669,7 +7669,7 @@
     </p:spTree>
     <p:extLst>
       <p:ext uri="{BB962C8B-B14F-4D97-AF65-F5344CB8AC3E}">
-        <p14:creationId xmlns:p14="http://schemas.microsoft.com/office/powerpoint/2010/main" val="571555627"/>
+        <p14:creationId xmlns:p14="http://schemas.microsoft.com/office/powerpoint/2010/main" val="1464127296"/>
       </p:ext>
     </p:extLst>
   </p:cSld>
@@ -7693,7 +7693,7 @@
           <p:cNvPr id="2" name="">
             <a:extLst xmlns:a="http://schemas.openxmlformats.org/drawingml/2006/main">
               <a:ext uri="{FF2B5EF4-FFF2-40B4-BE49-F238E27FC236}">
-                <a16:creationId xmlns:a16="http://schemas.microsoft.com/office/drawing/2014/main" id="{2C7537AB-471D-4A61-86FE-30E9E11FA525}"/>
+                <a16:creationId xmlns:a16="http://schemas.microsoft.com/office/drawing/2014/main" id="{763D20AD-E742-4E06-8FB6-FF2B543FC085}"/>
               </a:ext>
             </a:extLst>
           </p:cNvPr>
@@ -7703,7 +7703,7 @@
           <p:nvPr/>
         </p:nvPicPr>
         <p:blipFill>
-          <a:blip xmlns:r="http://schemas.openxmlformats.org/officeDocument/2006/relationships" xmlns:a="http://schemas.openxmlformats.org/drawingml/2006/main" r:embed="R0fbe07d307564edc"/>
+          <a:blip xmlns:r="http://schemas.openxmlformats.org/officeDocument/2006/relationships" xmlns:a="http://schemas.openxmlformats.org/drawingml/2006/main" r:embed="R608b753ad28940b5"/>
           <a:stretch xmlns:a="http://schemas.openxmlformats.org/drawingml/2006/main"/>
         </p:blipFill>
         <p:spPr>
@@ -7719,7 +7719,7 @@
     </p:spTree>
     <p:extLst>
       <p:ext uri="{BB962C8B-B14F-4D97-AF65-F5344CB8AC3E}">
-        <p14:creationId xmlns:p14="http://schemas.microsoft.com/office/powerpoint/2010/main" val="2117740541"/>
+        <p14:creationId xmlns:p14="http://schemas.microsoft.com/office/powerpoint/2010/main" val="1430347483"/>
       </p:ext>
     </p:extLst>
   </p:cSld>
@@ -7743,7 +7743,7 @@
           <p:cNvPr id="2" name="">
             <a:extLst xmlns:a="http://schemas.openxmlformats.org/drawingml/2006/main">
               <a:ext uri="{FF2B5EF4-FFF2-40B4-BE49-F238E27FC236}">
-                <a16:creationId xmlns:a16="http://schemas.microsoft.com/office/drawing/2014/main" id="{4C9986AE-1F6D-4ADD-A3CB-75A02194AB18}"/>
+                <a16:creationId xmlns:a16="http://schemas.microsoft.com/office/drawing/2014/main" id="{06B5A07E-8756-482C-8661-4DEBB2430A75}"/>
               </a:ext>
             </a:extLst>
           </p:cNvPr>
@@ -7753,7 +7753,7 @@
           <p:nvPr/>
         </p:nvPicPr>
         <p:blipFill>
-          <a:blip xmlns:r="http://schemas.openxmlformats.org/officeDocument/2006/relationships" xmlns:a="http://schemas.openxmlformats.org/drawingml/2006/main" r:embed="Rd20cd05bc6fc4445"/>
+          <a:blip xmlns:r="http://schemas.openxmlformats.org/officeDocument/2006/relationships" xmlns:a="http://schemas.openxmlformats.org/drawingml/2006/main" r:embed="Rcfac36d1c90b4fce"/>
           <a:stretch xmlns:a="http://schemas.openxmlformats.org/drawingml/2006/main"/>
         </p:blipFill>
         <p:spPr>
@@ -7769,7 +7769,7 @@
     </p:spTree>
     <p:extLst>
       <p:ext uri="{BB962C8B-B14F-4D97-AF65-F5344CB8AC3E}">
-        <p14:creationId xmlns:p14="http://schemas.microsoft.com/office/powerpoint/2010/main" val="1104117819"/>
+        <p14:creationId xmlns:p14="http://schemas.microsoft.com/office/powerpoint/2010/main" val="29823495"/>
       </p:ext>
     </p:extLst>
   </p:cSld>
@@ -7793,7 +7793,7 @@
           <p:cNvPr id="2" name="">
             <a:extLst xmlns:a="http://schemas.openxmlformats.org/drawingml/2006/main">
               <a:ext uri="{FF2B5EF4-FFF2-40B4-BE49-F238E27FC236}">
-                <a16:creationId xmlns:a16="http://schemas.microsoft.com/office/drawing/2014/main" id="{35E8A736-971E-4FFD-A01F-ADC12D8E41E2}"/>
+                <a16:creationId xmlns:a16="http://schemas.microsoft.com/office/drawing/2014/main" id="{96EFE924-E94E-4314-B6B9-E5E02F071FCA}"/>
               </a:ext>
             </a:extLst>
           </p:cNvPr>
@@ -7803,7 +7803,7 @@
           <p:nvPr/>
         </p:nvPicPr>
         <p:blipFill>
-          <a:blip xmlns:r="http://schemas.openxmlformats.org/officeDocument/2006/relationships" xmlns:a="http://schemas.openxmlformats.org/drawingml/2006/main" r:embed="R6193099e27e54cb5"/>
+          <a:blip xmlns:r="http://schemas.openxmlformats.org/officeDocument/2006/relationships" xmlns:a="http://schemas.openxmlformats.org/drawingml/2006/main" r:embed="R67e33cc92d2d447f"/>
           <a:stretch xmlns:a="http://schemas.openxmlformats.org/drawingml/2006/main"/>
         </p:blipFill>
         <p:spPr>
@@ -7819,7 +7819,7 @@
     </p:spTree>
     <p:extLst>
       <p:ext uri="{BB962C8B-B14F-4D97-AF65-F5344CB8AC3E}">
-        <p14:creationId xmlns:p14="http://schemas.microsoft.com/office/powerpoint/2010/main" val="1704155828"/>
+        <p14:creationId xmlns:p14="http://schemas.microsoft.com/office/powerpoint/2010/main" val="1273131582"/>
       </p:ext>
     </p:extLst>
   </p:cSld>
